--- a/pptx/ThyroidXAgent_SegCls_performance.pptx
+++ b/pptx/ThyroidXAgent_SegCls_performance.pptx
@@ -243,7 +243,7 @@
           <a:p>
             <a:fld id="{46858E3D-4FB0-43EE-832D-2275ACAC2047}" type="datetimeFigureOut">
               <a:rPr lang="zh-CN" altLang="en-US" smtClean="0"/>
-              <a:t>2026/6/14</a:t>
+              <a:t>2026/6/19</a:t>
             </a:fld>
             <a:endParaRPr lang="zh-CN" altLang="en-US"/>
           </a:p>
@@ -413,7 +413,7 @@
           <a:p>
             <a:fld id="{46858E3D-4FB0-43EE-832D-2275ACAC2047}" type="datetimeFigureOut">
               <a:rPr lang="zh-CN" altLang="en-US" smtClean="0"/>
-              <a:t>2026/6/14</a:t>
+              <a:t>2026/6/19</a:t>
             </a:fld>
             <a:endParaRPr lang="zh-CN" altLang="en-US"/>
           </a:p>
@@ -593,7 +593,7 @@
           <a:p>
             <a:fld id="{46858E3D-4FB0-43EE-832D-2275ACAC2047}" type="datetimeFigureOut">
               <a:rPr lang="zh-CN" altLang="en-US" smtClean="0"/>
-              <a:t>2026/6/14</a:t>
+              <a:t>2026/6/19</a:t>
             </a:fld>
             <a:endParaRPr lang="zh-CN" altLang="en-US"/>
           </a:p>
@@ -763,7 +763,7 @@
           <a:p>
             <a:fld id="{46858E3D-4FB0-43EE-832D-2275ACAC2047}" type="datetimeFigureOut">
               <a:rPr lang="zh-CN" altLang="en-US" smtClean="0"/>
-              <a:t>2026/6/14</a:t>
+              <a:t>2026/6/19</a:t>
             </a:fld>
             <a:endParaRPr lang="zh-CN" altLang="en-US"/>
           </a:p>
@@ -1007,7 +1007,7 @@
           <a:p>
             <a:fld id="{46858E3D-4FB0-43EE-832D-2275ACAC2047}" type="datetimeFigureOut">
               <a:rPr lang="zh-CN" altLang="en-US" smtClean="0"/>
-              <a:t>2026/6/14</a:t>
+              <a:t>2026/6/19</a:t>
             </a:fld>
             <a:endParaRPr lang="zh-CN" altLang="en-US"/>
           </a:p>
@@ -1239,7 +1239,7 @@
           <a:p>
             <a:fld id="{46858E3D-4FB0-43EE-832D-2275ACAC2047}" type="datetimeFigureOut">
               <a:rPr lang="zh-CN" altLang="en-US" smtClean="0"/>
-              <a:t>2026/6/14</a:t>
+              <a:t>2026/6/19</a:t>
             </a:fld>
             <a:endParaRPr lang="zh-CN" altLang="en-US"/>
           </a:p>
@@ -1606,7 +1606,7 @@
           <a:p>
             <a:fld id="{46858E3D-4FB0-43EE-832D-2275ACAC2047}" type="datetimeFigureOut">
               <a:rPr lang="zh-CN" altLang="en-US" smtClean="0"/>
-              <a:t>2026/6/14</a:t>
+              <a:t>2026/6/19</a:t>
             </a:fld>
             <a:endParaRPr lang="zh-CN" altLang="en-US"/>
           </a:p>
@@ -1724,7 +1724,7 @@
           <a:p>
             <a:fld id="{46858E3D-4FB0-43EE-832D-2275ACAC2047}" type="datetimeFigureOut">
               <a:rPr lang="zh-CN" altLang="en-US" smtClean="0"/>
-              <a:t>2026/6/14</a:t>
+              <a:t>2026/6/19</a:t>
             </a:fld>
             <a:endParaRPr lang="zh-CN" altLang="en-US"/>
           </a:p>
@@ -1819,7 +1819,7 @@
           <a:p>
             <a:fld id="{46858E3D-4FB0-43EE-832D-2275ACAC2047}" type="datetimeFigureOut">
               <a:rPr lang="zh-CN" altLang="en-US" smtClean="0"/>
-              <a:t>2026/6/14</a:t>
+              <a:t>2026/6/19</a:t>
             </a:fld>
             <a:endParaRPr lang="zh-CN" altLang="en-US"/>
           </a:p>
@@ -2096,7 +2096,7 @@
           <a:p>
             <a:fld id="{46858E3D-4FB0-43EE-832D-2275ACAC2047}" type="datetimeFigureOut">
               <a:rPr lang="zh-CN" altLang="en-US" smtClean="0"/>
-              <a:t>2026/6/14</a:t>
+              <a:t>2026/6/19</a:t>
             </a:fld>
             <a:endParaRPr lang="zh-CN" altLang="en-US"/>
           </a:p>
@@ -2353,7 +2353,7 @@
           <a:p>
             <a:fld id="{46858E3D-4FB0-43EE-832D-2275ACAC2047}" type="datetimeFigureOut">
               <a:rPr lang="zh-CN" altLang="en-US" smtClean="0"/>
-              <a:t>2026/6/14</a:t>
+              <a:t>2026/6/19</a:t>
             </a:fld>
             <a:endParaRPr lang="zh-CN" altLang="en-US"/>
           </a:p>
@@ -2566,7 +2566,7 @@
           <a:p>
             <a:fld id="{46858E3D-4FB0-43EE-832D-2275ACAC2047}" type="datetimeFigureOut">
               <a:rPr lang="zh-CN" altLang="en-US" smtClean="0"/>
-              <a:t>2026/6/14</a:t>
+              <a:t>2026/6/19</a:t>
             </a:fld>
             <a:endParaRPr lang="zh-CN" altLang="en-US"/>
           </a:p>
@@ -5730,43 +5730,6 @@
           </a:prstGeom>
         </p:spPr>
       </p:pic>
-      <p:pic>
-        <p:nvPicPr>
-          <p:cNvPr id="10" name="图片 9">
-            <a:extLst>
-              <a:ext uri="{FF2B5EF4-FFF2-40B4-BE49-F238E27FC236}">
-                <a16:creationId xmlns:a16="http://schemas.microsoft.com/office/drawing/2014/main" id="{93585760-2CCF-9498-549C-926BF1662BF3}"/>
-              </a:ext>
-            </a:extLst>
-          </p:cNvPr>
-          <p:cNvPicPr>
-            <a:picLocks noChangeAspect="1"/>
-          </p:cNvPicPr>
-          <p:nvPr/>
-        </p:nvPicPr>
-        <p:blipFill>
-          <a:blip r:embed="rId11" cstate="print">
-            <a:extLst>
-              <a:ext uri="{28A0092B-C50C-407E-A947-70E740481C1C}">
-                <a14:useLocalDpi xmlns:a14="http://schemas.microsoft.com/office/drawing/2010/main" val="0"/>
-              </a:ext>
-            </a:extLst>
-          </a:blip>
-          <a:srcRect l="2534"/>
-          <a:stretch>
-            <a:fillRect/>
-          </a:stretch>
-        </p:blipFill>
-        <p:spPr>
-          <a:xfrm>
-            <a:off x="12229304" y="0"/>
-            <a:ext cx="5954106" cy="5580000"/>
-          </a:xfrm>
-          <a:prstGeom prst="rect">
-            <a:avLst/>
-          </a:prstGeom>
-        </p:spPr>
-      </p:pic>
       <p:sp>
         <p:nvSpPr>
           <p:cNvPr id="18" name="文本框 17">
@@ -5809,43 +5772,6 @@
           </a:p>
         </p:txBody>
       </p:sp>
-      <p:pic>
-        <p:nvPicPr>
-          <p:cNvPr id="9" name="图片 8">
-            <a:extLst>
-              <a:ext uri="{FF2B5EF4-FFF2-40B4-BE49-F238E27FC236}">
-                <a16:creationId xmlns:a16="http://schemas.microsoft.com/office/drawing/2014/main" id="{563CF3C9-7BA1-8FA9-B1B0-3C144A92B875}"/>
-              </a:ext>
-            </a:extLst>
-          </p:cNvPr>
-          <p:cNvPicPr>
-            <a:picLocks noChangeAspect="1"/>
-          </p:cNvPicPr>
-          <p:nvPr/>
-        </p:nvPicPr>
-        <p:blipFill>
-          <a:blip r:embed="rId12" cstate="print">
-            <a:extLst>
-              <a:ext uri="{28A0092B-C50C-407E-A947-70E740481C1C}">
-                <a14:useLocalDpi xmlns:a14="http://schemas.microsoft.com/office/drawing/2010/main" val="0"/>
-              </a:ext>
-            </a:extLst>
-          </a:blip>
-          <a:srcRect l="2803" r="3121"/>
-          <a:stretch>
-            <a:fillRect/>
-          </a:stretch>
-        </p:blipFill>
-        <p:spPr>
-          <a:xfrm>
-            <a:off x="18013169" y="0"/>
-            <a:ext cx="5746944" cy="5580000"/>
-          </a:xfrm>
-          <a:prstGeom prst="rect">
-            <a:avLst/>
-          </a:prstGeom>
-        </p:spPr>
-      </p:pic>
       <p:sp>
         <p:nvSpPr>
           <p:cNvPr id="19" name="文本框 18">
@@ -5980,6 +5906,78 @@
           </a:p>
         </p:txBody>
       </p:sp>
+      <p:pic>
+        <p:nvPicPr>
+          <p:cNvPr id="5" name="图片 4">
+            <a:extLst>
+              <a:ext uri="{FF2B5EF4-FFF2-40B4-BE49-F238E27FC236}">
+                <a16:creationId xmlns:a16="http://schemas.microsoft.com/office/drawing/2014/main" id="{02938B96-0E8A-975D-55A9-E201C0638392}"/>
+              </a:ext>
+            </a:extLst>
+          </p:cNvPr>
+          <p:cNvPicPr>
+            <a:picLocks noChangeAspect="1"/>
+          </p:cNvPicPr>
+          <p:nvPr/>
+        </p:nvPicPr>
+        <p:blipFill>
+          <a:blip r:embed="rId11">
+            <a:extLst>
+              <a:ext uri="{28A0092B-C50C-407E-A947-70E740481C1C}">
+                <a14:useLocalDpi xmlns:a14="http://schemas.microsoft.com/office/drawing/2010/main" val="0"/>
+              </a:ext>
+            </a:extLst>
+          </a:blip>
+          <a:stretch>
+            <a:fillRect/>
+          </a:stretch>
+        </p:blipFill>
+        <p:spPr>
+          <a:xfrm>
+            <a:off x="17718566" y="0"/>
+            <a:ext cx="6090332" cy="5580000"/>
+          </a:xfrm>
+          <a:prstGeom prst="rect">
+            <a:avLst/>
+          </a:prstGeom>
+        </p:spPr>
+      </p:pic>
+      <p:pic>
+        <p:nvPicPr>
+          <p:cNvPr id="8" name="图片 7">
+            <a:extLst>
+              <a:ext uri="{FF2B5EF4-FFF2-40B4-BE49-F238E27FC236}">
+                <a16:creationId xmlns:a16="http://schemas.microsoft.com/office/drawing/2014/main" id="{087E17D1-272C-6AC3-1B4B-249D8419DE9D}"/>
+              </a:ext>
+            </a:extLst>
+          </p:cNvPr>
+          <p:cNvPicPr>
+            <a:picLocks noChangeAspect="1"/>
+          </p:cNvPicPr>
+          <p:nvPr/>
+        </p:nvPicPr>
+        <p:blipFill>
+          <a:blip r:embed="rId12">
+            <a:extLst>
+              <a:ext uri="{28A0092B-C50C-407E-A947-70E740481C1C}">
+                <a14:useLocalDpi xmlns:a14="http://schemas.microsoft.com/office/drawing/2010/main" val="0"/>
+              </a:ext>
+            </a:extLst>
+          </a:blip>
+          <a:stretch>
+            <a:fillRect/>
+          </a:stretch>
+        </p:blipFill>
+        <p:spPr>
+          <a:xfrm>
+            <a:off x="12121728" y="9769"/>
+            <a:ext cx="6090332" cy="5580000"/>
+          </a:xfrm>
+          <a:prstGeom prst="rect">
+            <a:avLst/>
+          </a:prstGeom>
+        </p:spPr>
+      </p:pic>
     </p:spTree>
     <p:extLst>
       <p:ext uri="{BB962C8B-B14F-4D97-AF65-F5344CB8AC3E}">

--- a/pptx/ThyroidXAgent_SegCls_performance.pptx
+++ b/pptx/ThyroidXAgent_SegCls_performance.pptx
@@ -243,7 +243,7 @@
           <a:p>
             <a:fld id="{46858E3D-4FB0-43EE-832D-2275ACAC2047}" type="datetimeFigureOut">
               <a:rPr lang="zh-CN" altLang="en-US" smtClean="0"/>
-              <a:t>2026/6/19</a:t>
+              <a:t>2026/6/20</a:t>
             </a:fld>
             <a:endParaRPr lang="zh-CN" altLang="en-US"/>
           </a:p>
@@ -413,7 +413,7 @@
           <a:p>
             <a:fld id="{46858E3D-4FB0-43EE-832D-2275ACAC2047}" type="datetimeFigureOut">
               <a:rPr lang="zh-CN" altLang="en-US" smtClean="0"/>
-              <a:t>2026/6/19</a:t>
+              <a:t>2026/6/20</a:t>
             </a:fld>
             <a:endParaRPr lang="zh-CN" altLang="en-US"/>
           </a:p>
@@ -593,7 +593,7 @@
           <a:p>
             <a:fld id="{46858E3D-4FB0-43EE-832D-2275ACAC2047}" type="datetimeFigureOut">
               <a:rPr lang="zh-CN" altLang="en-US" smtClean="0"/>
-              <a:t>2026/6/19</a:t>
+              <a:t>2026/6/20</a:t>
             </a:fld>
             <a:endParaRPr lang="zh-CN" altLang="en-US"/>
           </a:p>
@@ -763,7 +763,7 @@
           <a:p>
             <a:fld id="{46858E3D-4FB0-43EE-832D-2275ACAC2047}" type="datetimeFigureOut">
               <a:rPr lang="zh-CN" altLang="en-US" smtClean="0"/>
-              <a:t>2026/6/19</a:t>
+              <a:t>2026/6/20</a:t>
             </a:fld>
             <a:endParaRPr lang="zh-CN" altLang="en-US"/>
           </a:p>
@@ -1007,7 +1007,7 @@
           <a:p>
             <a:fld id="{46858E3D-4FB0-43EE-832D-2275ACAC2047}" type="datetimeFigureOut">
               <a:rPr lang="zh-CN" altLang="en-US" smtClean="0"/>
-              <a:t>2026/6/19</a:t>
+              <a:t>2026/6/20</a:t>
             </a:fld>
             <a:endParaRPr lang="zh-CN" altLang="en-US"/>
           </a:p>
@@ -1239,7 +1239,7 @@
           <a:p>
             <a:fld id="{46858E3D-4FB0-43EE-832D-2275ACAC2047}" type="datetimeFigureOut">
               <a:rPr lang="zh-CN" altLang="en-US" smtClean="0"/>
-              <a:t>2026/6/19</a:t>
+              <a:t>2026/6/20</a:t>
             </a:fld>
             <a:endParaRPr lang="zh-CN" altLang="en-US"/>
           </a:p>
@@ -1606,7 +1606,7 @@
           <a:p>
             <a:fld id="{46858E3D-4FB0-43EE-832D-2275ACAC2047}" type="datetimeFigureOut">
               <a:rPr lang="zh-CN" altLang="en-US" smtClean="0"/>
-              <a:t>2026/6/19</a:t>
+              <a:t>2026/6/20</a:t>
             </a:fld>
             <a:endParaRPr lang="zh-CN" altLang="en-US"/>
           </a:p>
@@ -1724,7 +1724,7 @@
           <a:p>
             <a:fld id="{46858E3D-4FB0-43EE-832D-2275ACAC2047}" type="datetimeFigureOut">
               <a:rPr lang="zh-CN" altLang="en-US" smtClean="0"/>
-              <a:t>2026/6/19</a:t>
+              <a:t>2026/6/20</a:t>
             </a:fld>
             <a:endParaRPr lang="zh-CN" altLang="en-US"/>
           </a:p>
@@ -1819,7 +1819,7 @@
           <a:p>
             <a:fld id="{46858E3D-4FB0-43EE-832D-2275ACAC2047}" type="datetimeFigureOut">
               <a:rPr lang="zh-CN" altLang="en-US" smtClean="0"/>
-              <a:t>2026/6/19</a:t>
+              <a:t>2026/6/20</a:t>
             </a:fld>
             <a:endParaRPr lang="zh-CN" altLang="en-US"/>
           </a:p>
@@ -2096,7 +2096,7 @@
           <a:p>
             <a:fld id="{46858E3D-4FB0-43EE-832D-2275ACAC2047}" type="datetimeFigureOut">
               <a:rPr lang="zh-CN" altLang="en-US" smtClean="0"/>
-              <a:t>2026/6/19</a:t>
+              <a:t>2026/6/20</a:t>
             </a:fld>
             <a:endParaRPr lang="zh-CN" altLang="en-US"/>
           </a:p>
@@ -2353,7 +2353,7 @@
           <a:p>
             <a:fld id="{46858E3D-4FB0-43EE-832D-2275ACAC2047}" type="datetimeFigureOut">
               <a:rPr lang="zh-CN" altLang="en-US" smtClean="0"/>
-              <a:t>2026/6/19</a:t>
+              <a:t>2026/6/20</a:t>
             </a:fld>
             <a:endParaRPr lang="zh-CN" altLang="en-US"/>
           </a:p>
@@ -2566,7 +2566,7 @@
           <a:p>
             <a:fld id="{46858E3D-4FB0-43EE-832D-2275ACAC2047}" type="datetimeFigureOut">
               <a:rPr lang="zh-CN" altLang="en-US" smtClean="0"/>
-              <a:t>2026/6/19</a:t>
+              <a:t>2026/6/20</a:t>
             </a:fld>
             <a:endParaRPr lang="zh-CN" altLang="en-US"/>
           </a:p>
@@ -2973,10 +2973,10 @@
       </p:grpSpPr>
       <p:pic>
         <p:nvPicPr>
-          <p:cNvPr id="6" name="图片 5">
-            <a:extLst>
-              <a:ext uri="{FF2B5EF4-FFF2-40B4-BE49-F238E27FC236}">
-                <a16:creationId xmlns:a16="http://schemas.microsoft.com/office/drawing/2014/main" id="{A7B085AC-D9ED-BA0D-418F-DA041786ACA4}"/>
+          <p:cNvPr id="81" name="图形 80">
+            <a:extLst>
+              <a:ext uri="{FF2B5EF4-FFF2-40B4-BE49-F238E27FC236}">
+                <a16:creationId xmlns:a16="http://schemas.microsoft.com/office/drawing/2014/main" id="{3CA205DF-AB85-3601-7D0F-C0E4A6D08BC3}"/>
               </a:ext>
             </a:extLst>
           </p:cNvPr>
@@ -2986,10 +2986,10 @@
           <p:nvPr/>
         </p:nvPicPr>
         <p:blipFill>
-          <a:blip r:embed="rId2">
-            <a:extLst>
-              <a:ext uri="{28A0092B-C50C-407E-A947-70E740481C1C}">
-                <a14:useLocalDpi xmlns:a14="http://schemas.microsoft.com/office/drawing/2010/main" val="0"/>
+          <a:blip>
+            <a:extLst>
+              <a:ext uri="{96DAC541-7B7A-43D3-8B79-37D633B846F1}">
+                <asvg:svgBlip xmlns:asvg="http://schemas.microsoft.com/office/drawing/2016/SVG/main" r:embed="rId2"/>
               </a:ext>
             </a:extLst>
           </a:blip>
@@ -2999,8 +2999,8 @@
         </p:blipFill>
         <p:spPr>
           <a:xfrm>
-            <a:off x="17204400" y="5421600"/>
-            <a:ext cx="6383482" cy="6480000"/>
+            <a:off x="608663" y="12002821"/>
+            <a:ext cx="6063787" cy="5400000"/>
           </a:xfrm>
           <a:prstGeom prst="rect">
             <a:avLst/>
@@ -3009,10 +3009,10 @@
       </p:pic>
       <p:pic>
         <p:nvPicPr>
-          <p:cNvPr id="4" name="图片 3">
-            <a:extLst>
-              <a:ext uri="{FF2B5EF4-FFF2-40B4-BE49-F238E27FC236}">
-                <a16:creationId xmlns:a16="http://schemas.microsoft.com/office/drawing/2014/main" id="{9231656C-A0F9-5BC5-B772-6CCA99BE94D9}"/>
+          <p:cNvPr id="25" name="图形 24">
+            <a:extLst>
+              <a:ext uri="{FF2B5EF4-FFF2-40B4-BE49-F238E27FC236}">
+                <a16:creationId xmlns:a16="http://schemas.microsoft.com/office/drawing/2014/main" id="{F8BDDB15-F8AC-649E-3EA1-881F8F1E62E8}"/>
               </a:ext>
             </a:extLst>
           </p:cNvPr>
@@ -3022,10 +3022,10 @@
           <p:nvPr/>
         </p:nvPicPr>
         <p:blipFill>
-          <a:blip r:embed="rId3">
-            <a:extLst>
-              <a:ext uri="{28A0092B-C50C-407E-A947-70E740481C1C}">
-                <a14:useLocalDpi xmlns:a14="http://schemas.microsoft.com/office/drawing/2010/main" val="0"/>
+          <a:blip>
+            <a:extLst>
+              <a:ext uri="{96DAC541-7B7A-43D3-8B79-37D633B846F1}">
+                <asvg:svgBlip xmlns:asvg="http://schemas.microsoft.com/office/drawing/2016/SVG/main" r:embed="rId3"/>
               </a:ext>
             </a:extLst>
           </a:blip>
@@ -3035,152 +3035,8 @@
         </p:blipFill>
         <p:spPr>
           <a:xfrm>
-            <a:off x="10389600" y="5421600"/>
-            <a:ext cx="6456570" cy="6480000"/>
-          </a:xfrm>
-          <a:prstGeom prst="rect">
-            <a:avLst/>
-          </a:prstGeom>
-        </p:spPr>
-      </p:pic>
-      <p:pic>
-        <p:nvPicPr>
-          <p:cNvPr id="81" name="图形 80">
-            <a:extLst>
-              <a:ext uri="{FF2B5EF4-FFF2-40B4-BE49-F238E27FC236}">
-                <a16:creationId xmlns:a16="http://schemas.microsoft.com/office/drawing/2014/main" id="{3CA205DF-AB85-3601-7D0F-C0E4A6D08BC3}"/>
-              </a:ext>
-            </a:extLst>
-          </p:cNvPr>
-          <p:cNvPicPr>
-            <a:picLocks noChangeAspect="1"/>
-          </p:cNvPicPr>
-          <p:nvPr/>
-        </p:nvPicPr>
-        <p:blipFill>
-          <a:blip>
-            <a:extLst>
-              <a:ext uri="{96DAC541-7B7A-43D3-8B79-37D633B846F1}">
-                <asvg:svgBlip xmlns:asvg="http://schemas.microsoft.com/office/drawing/2016/SVG/main" r:embed="rId4"/>
-              </a:ext>
-            </a:extLst>
-          </a:blip>
-          <a:stretch>
-            <a:fillRect/>
-          </a:stretch>
-        </p:blipFill>
-        <p:spPr>
-          <a:xfrm>
-            <a:off x="608663" y="12002821"/>
-            <a:ext cx="6063787" cy="5400000"/>
-          </a:xfrm>
-          <a:prstGeom prst="rect">
-            <a:avLst/>
-          </a:prstGeom>
-        </p:spPr>
-      </p:pic>
-      <p:pic>
-        <p:nvPicPr>
-          <p:cNvPr id="25" name="图形 24">
-            <a:extLst>
-              <a:ext uri="{FF2B5EF4-FFF2-40B4-BE49-F238E27FC236}">
-                <a16:creationId xmlns:a16="http://schemas.microsoft.com/office/drawing/2014/main" id="{F8BDDB15-F8AC-649E-3EA1-881F8F1E62E8}"/>
-              </a:ext>
-            </a:extLst>
-          </p:cNvPr>
-          <p:cNvPicPr>
-            <a:picLocks noChangeAspect="1"/>
-          </p:cNvPicPr>
-          <p:nvPr/>
-        </p:nvPicPr>
-        <p:blipFill>
-          <a:blip>
-            <a:extLst>
-              <a:ext uri="{96DAC541-7B7A-43D3-8B79-37D633B846F1}">
-                <asvg:svgBlip xmlns:asvg="http://schemas.microsoft.com/office/drawing/2016/SVG/main" r:embed="rId5"/>
-              </a:ext>
-            </a:extLst>
-          </a:blip>
-          <a:stretch>
-            <a:fillRect/>
-          </a:stretch>
-        </p:blipFill>
-        <p:spPr>
-          <a:xfrm>
             <a:off x="2729276" y="5408173"/>
             <a:ext cx="8280000" cy="5692500"/>
-          </a:xfrm>
-          <a:prstGeom prst="rect">
-            <a:avLst/>
-          </a:prstGeom>
-        </p:spPr>
-      </p:pic>
-      <p:pic>
-        <p:nvPicPr>
-          <p:cNvPr id="11" name="图片 10">
-            <a:extLst>
-              <a:ext uri="{FF2B5EF4-FFF2-40B4-BE49-F238E27FC236}">
-                <a16:creationId xmlns:a16="http://schemas.microsoft.com/office/drawing/2014/main" id="{7789972C-900C-E1E5-BF7A-D5922AE9047B}"/>
-              </a:ext>
-            </a:extLst>
-          </p:cNvPr>
-          <p:cNvPicPr>
-            <a:picLocks noChangeAspect="1"/>
-          </p:cNvPicPr>
-          <p:nvPr/>
-        </p:nvPicPr>
-        <p:blipFill>
-          <a:blip r:embed="rId6" cstate="print">
-            <a:extLst>
-              <a:ext uri="{28A0092B-C50C-407E-A947-70E740481C1C}">
-                <a14:useLocalDpi xmlns:a14="http://schemas.microsoft.com/office/drawing/2010/main" val="0"/>
-              </a:ext>
-            </a:extLst>
-          </a:blip>
-          <a:stretch>
-            <a:fillRect/>
-          </a:stretch>
-        </p:blipFill>
-        <p:spPr>
-          <a:xfrm>
-            <a:off x="31716" y="0"/>
-            <a:ext cx="6055856" cy="5580000"/>
-          </a:xfrm>
-          <a:prstGeom prst="rect">
-            <a:avLst/>
-          </a:prstGeom>
-        </p:spPr>
-      </p:pic>
-      <p:pic>
-        <p:nvPicPr>
-          <p:cNvPr id="12" name="图片 11">
-            <a:extLst>
-              <a:ext uri="{FF2B5EF4-FFF2-40B4-BE49-F238E27FC236}">
-                <a16:creationId xmlns:a16="http://schemas.microsoft.com/office/drawing/2014/main" id="{752FFD06-2729-0B06-393C-AA2E09C0663E}"/>
-              </a:ext>
-            </a:extLst>
-          </p:cNvPr>
-          <p:cNvPicPr>
-            <a:picLocks noChangeAspect="1"/>
-          </p:cNvPicPr>
-          <p:nvPr/>
-        </p:nvPicPr>
-        <p:blipFill>
-          <a:blip r:embed="rId7" cstate="print">
-            <a:extLst>
-              <a:ext uri="{28A0092B-C50C-407E-A947-70E740481C1C}">
-                <a14:useLocalDpi xmlns:a14="http://schemas.microsoft.com/office/drawing/2010/main" val="0"/>
-              </a:ext>
-            </a:extLst>
-          </a:blip>
-          <a:stretch>
-            <a:fillRect/>
-          </a:stretch>
-        </p:blipFill>
-        <p:spPr>
-          <a:xfrm>
-            <a:off x="6269583" y="0"/>
-            <a:ext cx="6050456" cy="5580000"/>
           </a:xfrm>
           <a:prstGeom prst="rect">
             <a:avLst/>
@@ -5064,7 +4920,7 @@
           <a:blip>
             <a:extLst>
               <a:ext uri="{96DAC541-7B7A-43D3-8B79-37D633B846F1}">
-                <asvg:svgBlip xmlns:asvg="http://schemas.microsoft.com/office/drawing/2016/SVG/main" r:embed="rId8"/>
+                <asvg:svgBlip xmlns:asvg="http://schemas.microsoft.com/office/drawing/2016/SVG/main" r:embed="rId4"/>
               </a:ext>
             </a:extLst>
           </a:blip>
@@ -5673,7 +5529,7 @@
           <p:nvPr/>
         </p:nvPicPr>
         <p:blipFill>
-          <a:blip r:embed="rId9">
+          <a:blip r:embed="rId5">
             <a:extLst>
               <a:ext uri="{28A0092B-C50C-407E-A947-70E740481C1C}">
                 <a14:useLocalDpi xmlns:a14="http://schemas.microsoft.com/office/drawing/2010/main" val="0"/>
@@ -5709,7 +5565,7 @@
           <p:nvPr/>
         </p:nvPicPr>
         <p:blipFill>
-          <a:blip r:embed="rId10">
+          <a:blip r:embed="rId6">
             <a:extLst>
               <a:ext uri="{28A0092B-C50C-407E-A947-70E740481C1C}">
                 <a14:useLocalDpi xmlns:a14="http://schemas.microsoft.com/office/drawing/2010/main" val="0"/>
@@ -5908,10 +5764,10 @@
       </p:sp>
       <p:pic>
         <p:nvPicPr>
-          <p:cNvPr id="5" name="图片 4">
-            <a:extLst>
-              <a:ext uri="{FF2B5EF4-FFF2-40B4-BE49-F238E27FC236}">
-                <a16:creationId xmlns:a16="http://schemas.microsoft.com/office/drawing/2014/main" id="{02938B96-0E8A-975D-55A9-E201C0638392}"/>
+          <p:cNvPr id="7" name="图片 6">
+            <a:extLst>
+              <a:ext uri="{FF2B5EF4-FFF2-40B4-BE49-F238E27FC236}">
+                <a16:creationId xmlns:a16="http://schemas.microsoft.com/office/drawing/2014/main" id="{8C797599-1A71-AB57-D88D-B89AFBAB6C23}"/>
               </a:ext>
             </a:extLst>
           </p:cNvPr>
@@ -5921,7 +5777,7 @@
           <p:nvPr/>
         </p:nvPicPr>
         <p:blipFill>
-          <a:blip r:embed="rId11">
+          <a:blip r:embed="rId7">
             <a:extLst>
               <a:ext uri="{28A0092B-C50C-407E-A947-70E740481C1C}">
                 <a14:useLocalDpi xmlns:a14="http://schemas.microsoft.com/office/drawing/2010/main" val="0"/>
@@ -5934,8 +5790,8 @@
         </p:blipFill>
         <p:spPr>
           <a:xfrm>
-            <a:off x="17718566" y="0"/>
-            <a:ext cx="6090332" cy="5580000"/>
+            <a:off x="0" y="0"/>
+            <a:ext cx="5903717" cy="5580000"/>
           </a:xfrm>
           <a:prstGeom prst="rect">
             <a:avLst/>
@@ -5944,10 +5800,10 @@
       </p:pic>
       <p:pic>
         <p:nvPicPr>
-          <p:cNvPr id="8" name="图片 7">
-            <a:extLst>
-              <a:ext uri="{FF2B5EF4-FFF2-40B4-BE49-F238E27FC236}">
-                <a16:creationId xmlns:a16="http://schemas.microsoft.com/office/drawing/2014/main" id="{087E17D1-272C-6AC3-1B4B-249D8419DE9D}"/>
+          <p:cNvPr id="10" name="图片 9">
+            <a:extLst>
+              <a:ext uri="{FF2B5EF4-FFF2-40B4-BE49-F238E27FC236}">
+                <a16:creationId xmlns:a16="http://schemas.microsoft.com/office/drawing/2014/main" id="{2862A21E-4916-9AF7-6051-5CA37FE953A2}"/>
               </a:ext>
             </a:extLst>
           </p:cNvPr>
@@ -5957,7 +5813,7 @@
           <p:nvPr/>
         </p:nvPicPr>
         <p:blipFill>
-          <a:blip r:embed="rId12">
+          <a:blip r:embed="rId8">
             <a:extLst>
               <a:ext uri="{28A0092B-C50C-407E-A947-70E740481C1C}">
                 <a14:useLocalDpi xmlns:a14="http://schemas.microsoft.com/office/drawing/2010/main" val="0"/>
@@ -5970,8 +5826,152 @@
         </p:blipFill>
         <p:spPr>
           <a:xfrm>
-            <a:off x="12121728" y="9769"/>
+            <a:off x="6271200" y="0"/>
+            <a:ext cx="5898231" cy="5580000"/>
+          </a:xfrm>
+          <a:prstGeom prst="rect">
+            <a:avLst/>
+          </a:prstGeom>
+        </p:spPr>
+      </p:pic>
+      <p:pic>
+        <p:nvPicPr>
+          <p:cNvPr id="57" name="图片 56">
+            <a:extLst>
+              <a:ext uri="{FF2B5EF4-FFF2-40B4-BE49-F238E27FC236}">
+                <a16:creationId xmlns:a16="http://schemas.microsoft.com/office/drawing/2014/main" id="{9E2EBBF4-0688-D250-DAB1-10E0BAD21048}"/>
+              </a:ext>
+            </a:extLst>
+          </p:cNvPr>
+          <p:cNvPicPr>
+            <a:picLocks noChangeAspect="1"/>
+          </p:cNvPicPr>
+          <p:nvPr/>
+        </p:nvPicPr>
+        <p:blipFill>
+          <a:blip r:embed="rId9">
+            <a:extLst>
+              <a:ext uri="{28A0092B-C50C-407E-A947-70E740481C1C}">
+                <a14:useLocalDpi xmlns:a14="http://schemas.microsoft.com/office/drawing/2010/main" val="0"/>
+              </a:ext>
+            </a:extLst>
+          </a:blip>
+          <a:stretch>
+            <a:fillRect/>
+          </a:stretch>
+        </p:blipFill>
+        <p:spPr>
+          <a:xfrm>
+            <a:off x="17719200" y="0"/>
             <a:ext cx="6090332" cy="5580000"/>
+          </a:xfrm>
+          <a:prstGeom prst="rect">
+            <a:avLst/>
+          </a:prstGeom>
+        </p:spPr>
+      </p:pic>
+      <p:pic>
+        <p:nvPicPr>
+          <p:cNvPr id="59" name="图片 58">
+            <a:extLst>
+              <a:ext uri="{FF2B5EF4-FFF2-40B4-BE49-F238E27FC236}">
+                <a16:creationId xmlns:a16="http://schemas.microsoft.com/office/drawing/2014/main" id="{55FC7209-2F75-B478-E492-767672088429}"/>
+              </a:ext>
+            </a:extLst>
+          </p:cNvPr>
+          <p:cNvPicPr>
+            <a:picLocks noChangeAspect="1"/>
+          </p:cNvPicPr>
+          <p:nvPr/>
+        </p:nvPicPr>
+        <p:blipFill>
+          <a:blip r:embed="rId10">
+            <a:extLst>
+              <a:ext uri="{28A0092B-C50C-407E-A947-70E740481C1C}">
+                <a14:useLocalDpi xmlns:a14="http://schemas.microsoft.com/office/drawing/2010/main" val="0"/>
+              </a:ext>
+            </a:extLst>
+          </a:blip>
+          <a:stretch>
+            <a:fillRect/>
+          </a:stretch>
+        </p:blipFill>
+        <p:spPr>
+          <a:xfrm>
+            <a:off x="12121200" y="0"/>
+            <a:ext cx="6090332" cy="5580000"/>
+          </a:xfrm>
+          <a:prstGeom prst="rect">
+            <a:avLst/>
+          </a:prstGeom>
+        </p:spPr>
+      </p:pic>
+      <p:pic>
+        <p:nvPicPr>
+          <p:cNvPr id="66" name="图片 65">
+            <a:extLst>
+              <a:ext uri="{FF2B5EF4-FFF2-40B4-BE49-F238E27FC236}">
+                <a16:creationId xmlns:a16="http://schemas.microsoft.com/office/drawing/2014/main" id="{92B30C4B-9A77-F7C6-75D0-B60D0B6E4BA5}"/>
+              </a:ext>
+            </a:extLst>
+          </p:cNvPr>
+          <p:cNvPicPr>
+            <a:picLocks noChangeAspect="1"/>
+          </p:cNvPicPr>
+          <p:nvPr/>
+        </p:nvPicPr>
+        <p:blipFill>
+          <a:blip r:embed="rId11">
+            <a:extLst>
+              <a:ext uri="{28A0092B-C50C-407E-A947-70E740481C1C}">
+                <a14:useLocalDpi xmlns:a14="http://schemas.microsoft.com/office/drawing/2010/main" val="0"/>
+              </a:ext>
+            </a:extLst>
+          </a:blip>
+          <a:stretch>
+            <a:fillRect/>
+          </a:stretch>
+        </p:blipFill>
+        <p:spPr>
+          <a:xfrm>
+            <a:off x="17204400" y="5421600"/>
+            <a:ext cx="6368755" cy="6480000"/>
+          </a:xfrm>
+          <a:prstGeom prst="rect">
+            <a:avLst/>
+          </a:prstGeom>
+        </p:spPr>
+      </p:pic>
+      <p:pic>
+        <p:nvPicPr>
+          <p:cNvPr id="68" name="图片 67">
+            <a:extLst>
+              <a:ext uri="{FF2B5EF4-FFF2-40B4-BE49-F238E27FC236}">
+                <a16:creationId xmlns:a16="http://schemas.microsoft.com/office/drawing/2014/main" id="{5B7C03A0-94D7-2829-C1BD-D873B48EDE38}"/>
+              </a:ext>
+            </a:extLst>
+          </p:cNvPr>
+          <p:cNvPicPr>
+            <a:picLocks noChangeAspect="1"/>
+          </p:cNvPicPr>
+          <p:nvPr/>
+        </p:nvPicPr>
+        <p:blipFill>
+          <a:blip r:embed="rId12">
+            <a:extLst>
+              <a:ext uri="{28A0092B-C50C-407E-A947-70E740481C1C}">
+                <a14:useLocalDpi xmlns:a14="http://schemas.microsoft.com/office/drawing/2010/main" val="0"/>
+              </a:ext>
+            </a:extLst>
+          </a:blip>
+          <a:stretch>
+            <a:fillRect/>
+          </a:stretch>
+        </p:blipFill>
+        <p:spPr>
+          <a:xfrm>
+            <a:off x="10389600" y="5421600"/>
+            <a:ext cx="6452069" cy="6480000"/>
           </a:xfrm>
           <a:prstGeom prst="rect">
             <a:avLst/>
